--- a/Agent Mode in Excel for Serious Work.pptx
+++ b/Agent Mode in Excel for Serious Work.pptx
@@ -35,21 +35,18 @@
   <p:embeddedFontLst>
     <p:embeddedFont>
       <p:font typeface="Avenir Next LT Pro" panose="020B0504020202020204" pitchFamily="34" charset="0"/>
-      <p:regular r:id="rId24"/>
-      <p:bold r:id="rId25"/>
-      <p:italic r:id="rId26"/>
-      <p:boldItalic r:id="rId27"/>
+      <p:boldItalic r:id="rId24"/>
     </p:embeddedFont>
     <p:embeddedFont>
       <p:font typeface="Century Gothic" panose="020B0502020202020204" pitchFamily="34" charset="0"/>
-      <p:regular r:id="rId28"/>
-      <p:bold r:id="rId29"/>
-      <p:italic r:id="rId30"/>
-      <p:boldItalic r:id="rId31"/>
+      <p:regular r:id="rId25"/>
+      <p:bold r:id="rId26"/>
+      <p:italic r:id="rId27"/>
+      <p:boldItalic r:id="rId28"/>
     </p:embeddedFont>
     <p:embeddedFont>
       <p:font typeface="Sabon Next LT" panose="02000500000000000000" pitchFamily="2" charset="0"/>
-      <p:regular r:id="rId32"/>
+      <p:bold r:id="rId29"/>
     </p:embeddedFont>
   </p:embeddedFontLst>
   <p:defaultTextStyle>
@@ -10905,73 +10902,8 @@
           <a:p>
             <a:r>
               <a:rPr lang="en-US" dirty="0"/>
-              <a:t>Let me tell you what I actually want you to be able to do by the end of this.</a:t>
-            </a:r>
-          </a:p>
-          <a:p>
-            <a:endParaRPr lang="en-US" dirty="0"/>
-          </a:p>
-          <a:p>
-            <a:r>
-              <a:rPr lang="en-US" dirty="0"/>
-              <a:t>I don’t want you walking out with a list of clever prompts. Those are fragile and they stop working the moment the workbook changes.</a:t>
-            </a:r>
-          </a:p>
-          <a:p>
-            <a:endParaRPr lang="en-US" dirty="0"/>
-          </a:p>
-          <a:p>
-            <a:r>
-              <a:rPr lang="en-US" dirty="0"/>
-              <a:t>What I </a:t>
-            </a:r>
-            <a:r>
-              <a:rPr lang="en-US" i="1" dirty="0"/>
-              <a:t>do</a:t>
-            </a:r>
-            <a:r>
-              <a:rPr lang="en-US" dirty="0"/>
-              <a:t> want is for you to be able to give Copilot clear, concrete instructions using things it already understands. Tables, columns, named objects. The same way you already think when you work in Excel.</a:t>
-            </a:r>
-          </a:p>
-          <a:p>
-            <a:endParaRPr lang="en-US" dirty="0"/>
-          </a:p>
-          <a:p>
-            <a:r>
-              <a:rPr lang="en-US" dirty="0"/>
-              <a:t>We’ll talk about how to control the output too. Not just asking questions, but telling Copilot what shape the answer should take. Short, structured, formatted in a way that’s actually usable.</a:t>
-            </a:r>
-          </a:p>
-          <a:p>
-            <a:endParaRPr lang="en-US" dirty="0"/>
-          </a:p>
-          <a:p>
-            <a:r>
-              <a:rPr lang="en-US" dirty="0"/>
-              <a:t>We’ll also spend time on what happens when a prompt doesn’t work, because that’s normal. Instead of guessing or blaming the tool, you’ll learn how to quickly see what went wrong and adjust the prompt without starting over.</a:t>
-            </a:r>
-          </a:p>
-          <a:p>
-            <a:endParaRPr lang="en-US" dirty="0"/>
-          </a:p>
-          <a:p>
-            <a:r>
-              <a:rPr lang="en-US" dirty="0"/>
-              <a:t>And along the way, I’ll show you a handful of prompt patterns I use myself. Things that work across different datasets and problems, not demo-only tricks.</a:t>
-            </a:r>
-          </a:p>
-          <a:p>
-            <a:endParaRPr lang="en-US" dirty="0"/>
-          </a:p>
-          <a:p>
-            <a:r>
-              <a:rPr lang="en-US" dirty="0"/>
-              <a:t>If this goes the way I want it to, Copilot should feel less like something you’re experimenting with and more like something you can reliably use when you need it.”</a:t>
-            </a:r>
-          </a:p>
-          <a:p>
-            <a:endParaRPr lang="en-US" dirty="0"/>
+              <a:t>https://chatgpt.com/c/698e1f57-0a4c-8333-9aaa-5083fb14add2</a:t>
+            </a:r>
           </a:p>
         </p:txBody>
       </p:sp>
@@ -10992,7 +10924,7 @@
           <a:p>
             <a:fld id="{FFB500C5-13F7-48FC-8160-C29AECF6C602}" type="slidenum">
               <a:rPr lang="en-US" smtClean="0"/>
-              <a:t>2</a:t>
+              <a:t>1</a:t>
             </a:fld>
             <a:endParaRPr lang="en-US"/>
           </a:p>
@@ -11001,7 +10933,7 @@
     </p:spTree>
     <p:extLst>
       <p:ext uri="{BB962C8B-B14F-4D97-AF65-F5344CB8AC3E}">
-        <p14:creationId xmlns:p14="http://schemas.microsoft.com/office/powerpoint/2010/main" val="3314691615"/>
+        <p14:creationId xmlns:p14="http://schemas.microsoft.com/office/powerpoint/2010/main" val="3247180116"/>
       </p:ext>
     </p:extLst>
   </p:cSld>
@@ -11012,6 +10944,153 @@
 </file>
 
 <file path=ppt/notesSlides/notesSlide10.xml><?xml version="1.0" encoding="utf-8"?>
+<p:notes xmlns:a="http://schemas.openxmlformats.org/drawingml/2006/main" xmlns:r="http://schemas.openxmlformats.org/officeDocument/2006/relationships" xmlns:p="http://schemas.openxmlformats.org/presentationml/2006/main">
+  <p:cSld>
+    <p:spTree>
+      <p:nvGrpSpPr>
+        <p:cNvPr id="1" name="">
+          <a:extLst>
+            <a:ext uri="{FF2B5EF4-FFF2-40B4-BE49-F238E27FC236}">
+              <a16:creationId xmlns:a16="http://schemas.microsoft.com/office/drawing/2014/main" id="{D64EF882-1F27-A164-2DD1-C1D1A24452CE}"/>
+            </a:ext>
+          </a:extLst>
+        </p:cNvPr>
+        <p:cNvGrpSpPr/>
+        <p:nvPr/>
+      </p:nvGrpSpPr>
+      <p:grpSpPr>
+        <a:xfrm>
+          <a:off x="0" y="0"/>
+          <a:ext cx="0" cy="0"/>
+          <a:chOff x="0" y="0"/>
+          <a:chExt cx="0" cy="0"/>
+        </a:xfrm>
+      </p:grpSpPr>
+      <p:sp>
+        <p:nvSpPr>
+          <p:cNvPr id="2" name="Slide Image Placeholder 1">
+            <a:extLst>
+              <a:ext uri="{FF2B5EF4-FFF2-40B4-BE49-F238E27FC236}">
+                <a16:creationId xmlns:a16="http://schemas.microsoft.com/office/drawing/2014/main" id="{7DBF08DF-558F-5ADE-6A05-232545F68DE1}"/>
+              </a:ext>
+            </a:extLst>
+          </p:cNvPr>
+          <p:cNvSpPr>
+            <a:spLocks noGrp="1" noRot="1" noChangeAspect="1"/>
+          </p:cNvSpPr>
+          <p:nvPr>
+            <p:ph type="sldImg"/>
+          </p:nvPr>
+        </p:nvSpPr>
+        <p:spPr/>
+      </p:sp>
+      <p:sp>
+        <p:nvSpPr>
+          <p:cNvPr id="3" name="Notes Placeholder 2">
+            <a:extLst>
+              <a:ext uri="{FF2B5EF4-FFF2-40B4-BE49-F238E27FC236}">
+                <a16:creationId xmlns:a16="http://schemas.microsoft.com/office/drawing/2014/main" id="{6B092613-BE32-CE16-4D73-5B20A10CB5A4}"/>
+              </a:ext>
+            </a:extLst>
+          </p:cNvPr>
+          <p:cNvSpPr>
+            <a:spLocks noGrp="1"/>
+          </p:cNvSpPr>
+          <p:nvPr>
+            <p:ph type="body" idx="1"/>
+          </p:nvPr>
+        </p:nvSpPr>
+        <p:spPr/>
+        <p:txBody>
+          <a:bodyPr>
+            <a:normAutofit/>
+          </a:bodyPr>
+          <a:lstStyle/>
+          <a:p>
+            <a:endParaRPr lang="en-US" sz="1800" dirty="0"/>
+          </a:p>
+        </p:txBody>
+      </p:sp>
+      <p:sp>
+        <p:nvSpPr>
+          <p:cNvPr id="4" name="Footer Placeholder 3">
+            <a:extLst>
+              <a:ext uri="{FF2B5EF4-FFF2-40B4-BE49-F238E27FC236}">
+                <a16:creationId xmlns:a16="http://schemas.microsoft.com/office/drawing/2014/main" id="{784D003F-BBD0-70E5-8BC0-F0FE2F3A0182}"/>
+              </a:ext>
+            </a:extLst>
+          </p:cNvPr>
+          <p:cNvSpPr>
+            <a:spLocks noGrp="1"/>
+          </p:cNvSpPr>
+          <p:nvPr>
+            <p:ph type="ftr" sz="quarter" idx="4"/>
+          </p:nvPr>
+        </p:nvSpPr>
+        <p:spPr/>
+        <p:txBody>
+          <a:bodyPr/>
+          <a:lstStyle/>
+          <a:p>
+            <a:pPr>
+              <a:defRPr/>
+            </a:pPr>
+            <a:r>
+              <a:rPr lang="en-GB" dirty="0"/>
+              <a:t>2014 – 2015 HR P&amp;P Change Professional Development Programme </a:t>
+            </a:r>
+          </a:p>
+        </p:txBody>
+      </p:sp>
+      <p:sp>
+        <p:nvSpPr>
+          <p:cNvPr id="5" name="Slide Number Placeholder 4">
+            <a:extLst>
+              <a:ext uri="{FF2B5EF4-FFF2-40B4-BE49-F238E27FC236}">
+                <a16:creationId xmlns:a16="http://schemas.microsoft.com/office/drawing/2014/main" id="{42BCDEF5-BC67-068A-A095-7C00283119BB}"/>
+              </a:ext>
+            </a:extLst>
+          </p:cNvPr>
+          <p:cNvSpPr>
+            <a:spLocks noGrp="1"/>
+          </p:cNvSpPr>
+          <p:nvPr>
+            <p:ph type="sldNum" sz="quarter" idx="5"/>
+          </p:nvPr>
+        </p:nvSpPr>
+        <p:spPr/>
+        <p:txBody>
+          <a:bodyPr/>
+          <a:lstStyle/>
+          <a:p>
+            <a:pPr>
+              <a:defRPr/>
+            </a:pPr>
+            <a:fld id="{ED330047-4CBA-4A63-9E55-79F1B5A3601F}" type="slidenum">
+              <a:rPr lang="en-GB" smtClean="0"/>
+              <a:pPr>
+                <a:defRPr/>
+              </a:pPr>
+              <a:t>10</a:t>
+            </a:fld>
+            <a:endParaRPr lang="en-GB" dirty="0"/>
+          </a:p>
+        </p:txBody>
+      </p:sp>
+    </p:spTree>
+    <p:extLst>
+      <p:ext uri="{BB962C8B-B14F-4D97-AF65-F5344CB8AC3E}">
+        <p14:creationId xmlns:p14="http://schemas.microsoft.com/office/powerpoint/2010/main" val="1479700152"/>
+      </p:ext>
+    </p:extLst>
+  </p:cSld>
+  <p:clrMapOvr>
+    <a:masterClrMapping/>
+  </p:clrMapOvr>
+</p:notes>
+</file>
+
+<file path=ppt/notesSlides/notesSlide11.xml><?xml version="1.0" encoding="utf-8"?>
 <p:notes xmlns:a="http://schemas.openxmlformats.org/drawingml/2006/main" xmlns:r="http://schemas.openxmlformats.org/officeDocument/2006/relationships" xmlns:p="http://schemas.openxmlformats.org/presentationml/2006/main">
   <p:cSld>
     <p:spTree>
@@ -11158,7 +11237,7 @@
 </p:notes>
 </file>
 
-<file path=ppt/notesSlides/notesSlide11.xml><?xml version="1.0" encoding="utf-8"?>
+<file path=ppt/notesSlides/notesSlide12.xml><?xml version="1.0" encoding="utf-8"?>
 <p:notes xmlns:a="http://schemas.openxmlformats.org/drawingml/2006/main" xmlns:r="http://schemas.openxmlformats.org/officeDocument/2006/relationships" xmlns:p="http://schemas.openxmlformats.org/presentationml/2006/main">
   <p:cSld>
     <p:spTree>
@@ -11305,7 +11384,7 @@
 </p:notes>
 </file>
 
-<file path=ppt/notesSlides/notesSlide12.xml><?xml version="1.0" encoding="utf-8"?>
+<file path=ppt/notesSlides/notesSlide13.xml><?xml version="1.0" encoding="utf-8"?>
 <p:notes xmlns:a="http://schemas.openxmlformats.org/drawingml/2006/main" xmlns:r="http://schemas.openxmlformats.org/officeDocument/2006/relationships" xmlns:p="http://schemas.openxmlformats.org/presentationml/2006/main">
   <p:cSld>
     <p:spTree>
@@ -11452,7 +11531,7 @@
 </p:notes>
 </file>
 
-<file path=ppt/notesSlides/notesSlide13.xml><?xml version="1.0" encoding="utf-8"?>
+<file path=ppt/notesSlides/notesSlide14.xml><?xml version="1.0" encoding="utf-8"?>
 <p:notes xmlns:a="http://schemas.openxmlformats.org/drawingml/2006/main" xmlns:r="http://schemas.openxmlformats.org/officeDocument/2006/relationships" xmlns:p="http://schemas.openxmlformats.org/presentationml/2006/main">
   <p:cSld>
     <p:spTree>
@@ -11599,7 +11678,7 @@
 </p:notes>
 </file>
 
-<file path=ppt/notesSlides/notesSlide14.xml><?xml version="1.0" encoding="utf-8"?>
+<file path=ppt/notesSlides/notesSlide15.xml><?xml version="1.0" encoding="utf-8"?>
 <p:notes xmlns:a="http://schemas.openxmlformats.org/drawingml/2006/main" xmlns:r="http://schemas.openxmlformats.org/officeDocument/2006/relationships" xmlns:p="http://schemas.openxmlformats.org/presentationml/2006/main">
   <p:cSld>
     <p:spTree>
@@ -11746,7 +11825,7 @@
 </p:notes>
 </file>
 
-<file path=ppt/notesSlides/notesSlide15.xml><?xml version="1.0" encoding="utf-8"?>
+<file path=ppt/notesSlides/notesSlide16.xml><?xml version="1.0" encoding="utf-8"?>
 <p:notes xmlns:a="http://schemas.openxmlformats.org/drawingml/2006/main" xmlns:r="http://schemas.openxmlformats.org/officeDocument/2006/relationships" xmlns:p="http://schemas.openxmlformats.org/presentationml/2006/main">
   <p:cSld>
     <p:spTree>
@@ -11967,7 +12046,7 @@
 </p:notes>
 </file>
 
-<file path=ppt/notesSlides/notesSlide16.xml><?xml version="1.0" encoding="utf-8"?>
+<file path=ppt/notesSlides/notesSlide17.xml><?xml version="1.0" encoding="utf-8"?>
 <p:notes xmlns:a="http://schemas.openxmlformats.org/drawingml/2006/main" xmlns:r="http://schemas.openxmlformats.org/officeDocument/2006/relationships" xmlns:p="http://schemas.openxmlformats.org/presentationml/2006/main">
   <p:cSld>
     <p:spTree>
@@ -12212,7 +12291,7 @@
 </p:notes>
 </file>
 
-<file path=ppt/notesSlides/notesSlide17.xml><?xml version="1.0" encoding="utf-8"?>
+<file path=ppt/notesSlides/notesSlide18.xml><?xml version="1.0" encoding="utf-8"?>
 <p:notes xmlns:a="http://schemas.openxmlformats.org/drawingml/2006/main" xmlns:r="http://schemas.openxmlformats.org/officeDocument/2006/relationships" xmlns:p="http://schemas.openxmlformats.org/presentationml/2006/main">
   <p:cSld>
     <p:spTree>
@@ -12423,7 +12502,7 @@
 </p:notes>
 </file>
 
-<file path=ppt/notesSlides/notesSlide18.xml><?xml version="1.0" encoding="utf-8"?>
+<file path=ppt/notesSlides/notesSlide19.xml><?xml version="1.0" encoding="utf-8"?>
 <p:notes xmlns:a="http://schemas.openxmlformats.org/drawingml/2006/main" xmlns:r="http://schemas.openxmlformats.org/officeDocument/2006/relationships" xmlns:p="http://schemas.openxmlformats.org/presentationml/2006/main">
   <p:cSld>
     <p:spTree>
@@ -12576,39 +12655,9 @@
           <a:lstStyle/>
           <a:p>
             <a:r>
-              <a:rPr lang="en-US" sz="1200" dirty="0"/>
-              <a:t>Quick grounding point before we go further.</a:t>
-            </a:r>
-          </a:p>
-          <a:p>
-            <a:endParaRPr lang="en-US" sz="1200" dirty="0"/>
-          </a:p>
-          <a:p>
-            <a:r>
-              <a:rPr lang="en-US" sz="1200" dirty="0"/>
-              <a:t>Copilot isn’t magic. It’s reading your workbook. Tables, columns, formulas, data types. That’s the context it works with.</a:t>
-            </a:r>
-          </a:p>
-          <a:p>
-            <a:endParaRPr lang="en-US" sz="1200" dirty="0"/>
-          </a:p>
-          <a:p>
-            <a:r>
-              <a:rPr lang="en-US" sz="1200" dirty="0"/>
-              <a:t>It works best when you tell it exactly what to use. When you don’t, it has to guess, and guessing is where things break.</a:t>
-            </a:r>
-          </a:p>
-          <a:p>
-            <a:endParaRPr lang="en-US" sz="1200" dirty="0"/>
-          </a:p>
-          <a:p>
-            <a:r>
-              <a:rPr lang="en-US" sz="1200" dirty="0"/>
-              <a:t>Many prompt issues in my experience aren’t AI issues. They’re context issues. Fix the context and the prompt usually fixes itself. </a:t>
-            </a:r>
-          </a:p>
-          <a:p>
-            <a:endParaRPr lang="en-US" dirty="0"/>
+              <a:rPr lang="en-US" dirty="0"/>
+              <a:t>\\\\</a:t>
+            </a:r>
           </a:p>
         </p:txBody>
       </p:sp>
@@ -12629,6 +12678,123 @@
           <a:p>
             <a:fld id="{FFB500C5-13F7-48FC-8160-C29AECF6C602}" type="slidenum">
               <a:rPr lang="en-US" smtClean="0"/>
+              <a:t>2</a:t>
+            </a:fld>
+            <a:endParaRPr lang="en-US"/>
+          </a:p>
+        </p:txBody>
+      </p:sp>
+    </p:spTree>
+    <p:extLst>
+      <p:ext uri="{BB962C8B-B14F-4D97-AF65-F5344CB8AC3E}">
+        <p14:creationId xmlns:p14="http://schemas.microsoft.com/office/powerpoint/2010/main" val="3314691615"/>
+      </p:ext>
+    </p:extLst>
+  </p:cSld>
+  <p:clrMapOvr>
+    <a:masterClrMapping/>
+  </p:clrMapOvr>
+</p:notes>
+</file>
+
+<file path=ppt/notesSlides/notesSlide3.xml><?xml version="1.0" encoding="utf-8"?>
+<p:notes xmlns:a="http://schemas.openxmlformats.org/drawingml/2006/main" xmlns:r="http://schemas.openxmlformats.org/officeDocument/2006/relationships" xmlns:p="http://schemas.openxmlformats.org/presentationml/2006/main">
+  <p:cSld>
+    <p:spTree>
+      <p:nvGrpSpPr>
+        <p:cNvPr id="1" name=""/>
+        <p:cNvGrpSpPr/>
+        <p:nvPr/>
+      </p:nvGrpSpPr>
+      <p:grpSpPr>
+        <a:xfrm>
+          <a:off x="0" y="0"/>
+          <a:ext cx="0" cy="0"/>
+          <a:chOff x="0" y="0"/>
+          <a:chExt cx="0" cy="0"/>
+        </a:xfrm>
+      </p:grpSpPr>
+      <p:sp>
+        <p:nvSpPr>
+          <p:cNvPr id="2" name="Slide Image Placeholder 1"/>
+          <p:cNvSpPr>
+            <a:spLocks noGrp="1" noRot="1" noChangeAspect="1"/>
+          </p:cNvSpPr>
+          <p:nvPr>
+            <p:ph type="sldImg"/>
+          </p:nvPr>
+        </p:nvSpPr>
+        <p:spPr/>
+      </p:sp>
+      <p:sp>
+        <p:nvSpPr>
+          <p:cNvPr id="3" name="Notes Placeholder 2"/>
+          <p:cNvSpPr>
+            <a:spLocks noGrp="1"/>
+          </p:cNvSpPr>
+          <p:nvPr>
+            <p:ph type="body" idx="1"/>
+          </p:nvPr>
+        </p:nvSpPr>
+        <p:spPr/>
+        <p:txBody>
+          <a:bodyPr/>
+          <a:lstStyle/>
+          <a:p>
+            <a:r>
+              <a:rPr lang="en-US" sz="1200" dirty="0"/>
+              <a:t>Quick grounding point before we go further.</a:t>
+            </a:r>
+          </a:p>
+          <a:p>
+            <a:endParaRPr lang="en-US" sz="1200" dirty="0"/>
+          </a:p>
+          <a:p>
+            <a:r>
+              <a:rPr lang="en-US" sz="1200" dirty="0"/>
+              <a:t>Copilot isn’t magic. It’s reading your workbook. Tables, columns, formulas, data types. That’s the context it works with.</a:t>
+            </a:r>
+          </a:p>
+          <a:p>
+            <a:endParaRPr lang="en-US" sz="1200" dirty="0"/>
+          </a:p>
+          <a:p>
+            <a:r>
+              <a:rPr lang="en-US" sz="1200" dirty="0"/>
+              <a:t>It works best when you tell it exactly what to use. When you don’t, it has to guess, and guessing is where things break.</a:t>
+            </a:r>
+          </a:p>
+          <a:p>
+            <a:endParaRPr lang="en-US" sz="1200" dirty="0"/>
+          </a:p>
+          <a:p>
+            <a:r>
+              <a:rPr lang="en-US" sz="1200" dirty="0"/>
+              <a:t>Many prompt issues in my experience aren’t AI issues. They’re context issues. Fix the context and the prompt usually fixes itself. </a:t>
+            </a:r>
+          </a:p>
+          <a:p>
+            <a:endParaRPr lang="en-US" dirty="0"/>
+          </a:p>
+        </p:txBody>
+      </p:sp>
+      <p:sp>
+        <p:nvSpPr>
+          <p:cNvPr id="4" name="Slide Number Placeholder 3"/>
+          <p:cNvSpPr>
+            <a:spLocks noGrp="1"/>
+          </p:cNvSpPr>
+          <p:nvPr>
+            <p:ph type="sldNum" sz="quarter" idx="5"/>
+          </p:nvPr>
+        </p:nvSpPr>
+        <p:spPr/>
+        <p:txBody>
+          <a:bodyPr/>
+          <a:lstStyle/>
+          <a:p>
+            <a:fld id="{FFB500C5-13F7-48FC-8160-C29AECF6C602}" type="slidenum">
+              <a:rPr lang="en-US" smtClean="0"/>
               <a:t>3</a:t>
             </a:fld>
             <a:endParaRPr lang="en-US"/>
@@ -12648,7 +12814,7 @@
 </p:notes>
 </file>
 
-<file path=ppt/notesSlides/notesSlide3.xml><?xml version="1.0" encoding="utf-8"?>
+<file path=ppt/notesSlides/notesSlide4.xml><?xml version="1.0" encoding="utf-8"?>
 <p:notes xmlns:a="http://schemas.openxmlformats.org/drawingml/2006/main" xmlns:r="http://schemas.openxmlformats.org/officeDocument/2006/relationships" xmlns:p="http://schemas.openxmlformats.org/presentationml/2006/main">
   <p:cSld>
     <p:spTree>
@@ -12809,7 +12975,7 @@
 </p:notes>
 </file>
 
-<file path=ppt/notesSlides/notesSlide4.xml><?xml version="1.0" encoding="utf-8"?>
+<file path=ppt/notesSlides/notesSlide5.xml><?xml version="1.0" encoding="utf-8"?>
 <p:notes xmlns:a="http://schemas.openxmlformats.org/drawingml/2006/main" xmlns:r="http://schemas.openxmlformats.org/officeDocument/2006/relationships" xmlns:p="http://schemas.openxmlformats.org/presentationml/2006/main">
   <p:cSld>
     <p:spTree>
@@ -12985,7 +13151,7 @@
 </p:notes>
 </file>
 
-<file path=ppt/notesSlides/notesSlide5.xml><?xml version="1.0" encoding="utf-8"?>
+<file path=ppt/notesSlides/notesSlide6.xml><?xml version="1.0" encoding="utf-8"?>
 <p:notes xmlns:a="http://schemas.openxmlformats.org/drawingml/2006/main" xmlns:r="http://schemas.openxmlformats.org/officeDocument/2006/relationships" xmlns:p="http://schemas.openxmlformats.org/presentationml/2006/main">
   <p:cSld>
     <p:spTree>
@@ -13177,7 +13343,7 @@
 </p:notes>
 </file>
 
-<file path=ppt/notesSlides/notesSlide6.xml><?xml version="1.0" encoding="utf-8"?>
+<file path=ppt/notesSlides/notesSlide7.xml><?xml version="1.0" encoding="utf-8"?>
 <p:notes xmlns:a="http://schemas.openxmlformats.org/drawingml/2006/main" xmlns:r="http://schemas.openxmlformats.org/officeDocument/2006/relationships" xmlns:p="http://schemas.openxmlformats.org/presentationml/2006/main">
   <p:cSld>
     <p:spTree>
@@ -13343,7 +13509,7 @@
 </p:notes>
 </file>
 
-<file path=ppt/notesSlides/notesSlide7.xml><?xml version="1.0" encoding="utf-8"?>
+<file path=ppt/notesSlides/notesSlide8.xml><?xml version="1.0" encoding="utf-8"?>
 <p:notes xmlns:a="http://schemas.openxmlformats.org/drawingml/2006/main" xmlns:r="http://schemas.openxmlformats.org/officeDocument/2006/relationships" xmlns:p="http://schemas.openxmlformats.org/presentationml/2006/main">
   <p:cSld>
     <p:spTree>
@@ -13490,7 +13656,7 @@
 </p:notes>
 </file>
 
-<file path=ppt/notesSlides/notesSlide8.xml><?xml version="1.0" encoding="utf-8"?>
+<file path=ppt/notesSlides/notesSlide9.xml><?xml version="1.0" encoding="utf-8"?>
 <p:notes xmlns:a="http://schemas.openxmlformats.org/drawingml/2006/main" xmlns:r="http://schemas.openxmlformats.org/officeDocument/2006/relationships" xmlns:p="http://schemas.openxmlformats.org/presentationml/2006/main">
   <p:cSld>
     <p:spTree>
@@ -13628,153 +13794,6 @@
     <p:extLst>
       <p:ext uri="{BB962C8B-B14F-4D97-AF65-F5344CB8AC3E}">
         <p14:creationId xmlns:p14="http://schemas.microsoft.com/office/powerpoint/2010/main" val="581028934"/>
-      </p:ext>
-    </p:extLst>
-  </p:cSld>
-  <p:clrMapOvr>
-    <a:masterClrMapping/>
-  </p:clrMapOvr>
-</p:notes>
-</file>
-
-<file path=ppt/notesSlides/notesSlide9.xml><?xml version="1.0" encoding="utf-8"?>
-<p:notes xmlns:a="http://schemas.openxmlformats.org/drawingml/2006/main" xmlns:r="http://schemas.openxmlformats.org/officeDocument/2006/relationships" xmlns:p="http://schemas.openxmlformats.org/presentationml/2006/main">
-  <p:cSld>
-    <p:spTree>
-      <p:nvGrpSpPr>
-        <p:cNvPr id="1" name="">
-          <a:extLst>
-            <a:ext uri="{FF2B5EF4-FFF2-40B4-BE49-F238E27FC236}">
-              <a16:creationId xmlns:a16="http://schemas.microsoft.com/office/drawing/2014/main" id="{D64EF882-1F27-A164-2DD1-C1D1A24452CE}"/>
-            </a:ext>
-          </a:extLst>
-        </p:cNvPr>
-        <p:cNvGrpSpPr/>
-        <p:nvPr/>
-      </p:nvGrpSpPr>
-      <p:grpSpPr>
-        <a:xfrm>
-          <a:off x="0" y="0"/>
-          <a:ext cx="0" cy="0"/>
-          <a:chOff x="0" y="0"/>
-          <a:chExt cx="0" cy="0"/>
-        </a:xfrm>
-      </p:grpSpPr>
-      <p:sp>
-        <p:nvSpPr>
-          <p:cNvPr id="2" name="Slide Image Placeholder 1">
-            <a:extLst>
-              <a:ext uri="{FF2B5EF4-FFF2-40B4-BE49-F238E27FC236}">
-                <a16:creationId xmlns:a16="http://schemas.microsoft.com/office/drawing/2014/main" id="{7DBF08DF-558F-5ADE-6A05-232545F68DE1}"/>
-              </a:ext>
-            </a:extLst>
-          </p:cNvPr>
-          <p:cNvSpPr>
-            <a:spLocks noGrp="1" noRot="1" noChangeAspect="1"/>
-          </p:cNvSpPr>
-          <p:nvPr>
-            <p:ph type="sldImg"/>
-          </p:nvPr>
-        </p:nvSpPr>
-        <p:spPr/>
-      </p:sp>
-      <p:sp>
-        <p:nvSpPr>
-          <p:cNvPr id="3" name="Notes Placeholder 2">
-            <a:extLst>
-              <a:ext uri="{FF2B5EF4-FFF2-40B4-BE49-F238E27FC236}">
-                <a16:creationId xmlns:a16="http://schemas.microsoft.com/office/drawing/2014/main" id="{6B092613-BE32-CE16-4D73-5B20A10CB5A4}"/>
-              </a:ext>
-            </a:extLst>
-          </p:cNvPr>
-          <p:cNvSpPr>
-            <a:spLocks noGrp="1"/>
-          </p:cNvSpPr>
-          <p:nvPr>
-            <p:ph type="body" idx="1"/>
-          </p:nvPr>
-        </p:nvSpPr>
-        <p:spPr/>
-        <p:txBody>
-          <a:bodyPr>
-            <a:normAutofit/>
-          </a:bodyPr>
-          <a:lstStyle/>
-          <a:p>
-            <a:endParaRPr lang="en-US" sz="1800" dirty="0"/>
-          </a:p>
-        </p:txBody>
-      </p:sp>
-      <p:sp>
-        <p:nvSpPr>
-          <p:cNvPr id="4" name="Footer Placeholder 3">
-            <a:extLst>
-              <a:ext uri="{FF2B5EF4-FFF2-40B4-BE49-F238E27FC236}">
-                <a16:creationId xmlns:a16="http://schemas.microsoft.com/office/drawing/2014/main" id="{784D003F-BBD0-70E5-8BC0-F0FE2F3A0182}"/>
-              </a:ext>
-            </a:extLst>
-          </p:cNvPr>
-          <p:cNvSpPr>
-            <a:spLocks noGrp="1"/>
-          </p:cNvSpPr>
-          <p:nvPr>
-            <p:ph type="ftr" sz="quarter" idx="4"/>
-          </p:nvPr>
-        </p:nvSpPr>
-        <p:spPr/>
-        <p:txBody>
-          <a:bodyPr/>
-          <a:lstStyle/>
-          <a:p>
-            <a:pPr>
-              <a:defRPr/>
-            </a:pPr>
-            <a:r>
-              <a:rPr lang="en-GB" dirty="0"/>
-              <a:t>2014 – 2015 HR P&amp;P Change Professional Development Programme </a:t>
-            </a:r>
-          </a:p>
-        </p:txBody>
-      </p:sp>
-      <p:sp>
-        <p:nvSpPr>
-          <p:cNvPr id="5" name="Slide Number Placeholder 4">
-            <a:extLst>
-              <a:ext uri="{FF2B5EF4-FFF2-40B4-BE49-F238E27FC236}">
-                <a16:creationId xmlns:a16="http://schemas.microsoft.com/office/drawing/2014/main" id="{42BCDEF5-BC67-068A-A095-7C00283119BB}"/>
-              </a:ext>
-            </a:extLst>
-          </p:cNvPr>
-          <p:cNvSpPr>
-            <a:spLocks noGrp="1"/>
-          </p:cNvSpPr>
-          <p:nvPr>
-            <p:ph type="sldNum" sz="quarter" idx="5"/>
-          </p:nvPr>
-        </p:nvSpPr>
-        <p:spPr/>
-        <p:txBody>
-          <a:bodyPr/>
-          <a:lstStyle/>
-          <a:p>
-            <a:pPr>
-              <a:defRPr/>
-            </a:pPr>
-            <a:fld id="{ED330047-4CBA-4A63-9E55-79F1B5A3601F}" type="slidenum">
-              <a:rPr lang="en-GB" smtClean="0"/>
-              <a:pPr>
-                <a:defRPr/>
-              </a:pPr>
-              <a:t>10</a:t>
-            </a:fld>
-            <a:endParaRPr lang="en-GB" dirty="0"/>
-          </a:p>
-        </p:txBody>
-      </p:sp>
-    </p:spTree>
-    <p:extLst>
-      <p:ext uri="{BB962C8B-B14F-4D97-AF65-F5344CB8AC3E}">
-        <p14:creationId xmlns:p14="http://schemas.microsoft.com/office/powerpoint/2010/main" val="1479700152"/>
       </p:ext>
     </p:extLst>
   </p:cSld>
@@ -17049,10 +17068,10 @@
       </p:sp>
       <p:pic>
         <p:nvPicPr>
-          <p:cNvPr id="3" name="Picture 2" descr="Copilot in Excel: Practical Prompting Patterns">
+          <p:cNvPr id="5" name="Picture 4" descr="The image depicts a futuristic robotic figure with a calculator and Excel logo, emphasizing the use of advanced software for serious work tasks.&#10;&#10;AI-generated content may be incorrect.">
             <a:extLst>
               <a:ext uri="{FF2B5EF4-FFF2-40B4-BE49-F238E27FC236}">
-                <a16:creationId xmlns:a16="http://schemas.microsoft.com/office/drawing/2014/main" id="{A1A76576-3E87-0598-EFA1-F12800A16E37}"/>
+                <a16:creationId xmlns:a16="http://schemas.microsoft.com/office/drawing/2014/main" id="{D91DE760-6D47-CA20-96E8-4F4606546616}"/>
               </a:ext>
             </a:extLst>
           </p:cNvPr>
@@ -17062,15 +17081,21 @@
           <p:nvPr/>
         </p:nvPicPr>
         <p:blipFill>
-          <a:blip r:embed="rId2"/>
+          <a:blip r:embed="rId3">
+            <a:extLst>
+              <a:ext uri="{28A0092B-C50C-407E-A947-70E740481C1C}">
+                <a14:useLocalDpi xmlns:a14="http://schemas.microsoft.com/office/drawing/2010/main" val="0"/>
+              </a:ext>
+            </a:extLst>
+          </a:blip>
           <a:stretch>
             <a:fillRect/>
           </a:stretch>
         </p:blipFill>
         <p:spPr>
           <a:xfrm>
-            <a:off x="1981200" y="-32335"/>
-            <a:ext cx="15479002" cy="10319335"/>
+            <a:off x="1371600" y="-38100"/>
+            <a:ext cx="15487650" cy="10325100"/>
           </a:xfrm>
           <a:prstGeom prst="rect">
             <a:avLst/>
@@ -19680,7 +19705,7 @@
               <a:rPr lang="en-US" sz="9000" dirty="0">
                 <a:latin typeface="Aliens &amp; cows" panose="00000500000000000000" pitchFamily="2" charset="0"/>
               </a:rPr>
-              <a:t>Objectives for this session</a:t>
+              <a:t>Housekeeping</a:t>
             </a:r>
           </a:p>
         </p:txBody>
